--- a/assets/pptx/catalog-300.pptx
+++ b/assets/pptx/catalog-300.pptx
@@ -3487,7 +3487,7 @@
                 <a:ea typeface="Ebrima"/>
                 <a:cs typeface="Ebrima"/>
               </a:rPr>
-              <a:t>ኢየሱስ እፈልግሃለሁ(3)</a:t>
+              <a:t>ኢየሱስ እፈልግሃለሁ3</a:t>
             </a:r>
           </a:p>
           <a:p>
@@ -3505,7 +3505,7 @@
                 <a:ea typeface="Ebrima"/>
                 <a:cs typeface="Ebrima"/>
               </a:rPr>
-              <a:t>ኢየሱስ እፈልግሃለሁ(3)</a:t>
+              <a:t>ኢየሱስ እፈልግሃለሁ3</a:t>
             </a:r>
           </a:p>
           <a:p>
@@ -3523,7 +3523,7 @@
                 <a:ea typeface="Ebrima"/>
                 <a:cs typeface="Ebrima"/>
               </a:rPr>
-              <a:t>ኢየሱስ እፈልግሃለሁ(3)</a:t>
+              <a:t>ኢየሱስ እፈልግሃለሁ3</a:t>
             </a:r>
           </a:p>
           <a:p>
@@ -3541,7 +3541,7 @@
                 <a:ea typeface="Ebrima"/>
                 <a:cs typeface="Ebrima"/>
               </a:rPr>
-              <a:t>ኢየሱስ እፈልግሃለሁ(3)</a:t>
+              <a:t>ኢየሱስ እፈልግሃለሁ3</a:t>
             </a:r>
           </a:p>
         </p:txBody>
@@ -3693,7 +3693,7 @@
                 <a:ea typeface="Ebrima"/>
                 <a:cs typeface="Ebrima"/>
               </a:rPr>
-              <a:t>ኢየሱስ እፈልግሃለሁ(3)</a:t>
+              <a:t>ኢየሱስ እፈልግሃለሁ3</a:t>
             </a:r>
           </a:p>
           <a:p>
@@ -3711,7 +3711,7 @@
                 <a:ea typeface="Ebrima"/>
                 <a:cs typeface="Ebrima"/>
               </a:rPr>
-              <a:t>ኢየሱስ እፈልግሃለሁ(3)</a:t>
+              <a:t>ኢየሱስ እፈልግሃለሁ3</a:t>
             </a:r>
           </a:p>
           <a:p>
@@ -3729,7 +3729,7 @@
                 <a:ea typeface="Ebrima"/>
                 <a:cs typeface="Ebrima"/>
               </a:rPr>
-              <a:t>ኢየሱስ እፈልግሃለሁ(3)</a:t>
+              <a:t>ኢየሱስ እፈልግሃለሁ3</a:t>
             </a:r>
           </a:p>
           <a:p>
@@ -3747,7 +3747,7 @@
                 <a:ea typeface="Ebrima"/>
                 <a:cs typeface="Ebrima"/>
               </a:rPr>
-              <a:t>ኢየሱስ እፈልግሃለሁ(3)</a:t>
+              <a:t>ኢየሱስ እፈልግሃለሁ3</a:t>
             </a:r>
           </a:p>
         </p:txBody>
